--- a/public/videos/repositories/showa-retro-route/showa-retro-route-tech-preview.pptx
+++ b/public/videos/repositories/showa-retro-route/showa-retro-route-tech-preview.pptx
@@ -134,7 +134,7 @@
           <p:cNvPr id="2" name="タイトル 1">
             <a:extLst>
               <a:ext uri="{FF2B5EF4-FFF2-40B4-BE49-F238E27FC236}">
-                <a16:creationId xmlns:a16="http://schemas.microsoft.com/office/drawing/2014/main" id="{37CAECCA-BED5-D975-53B3-CEFDEA99D32B}"/>
+                <a16:creationId xmlns:a16="http://schemas.microsoft.com/office/drawing/2014/main" id="{0CA1CF97-6CB1-94FA-A62B-98F69E1499FD}"/>
               </a:ext>
             </a:extLst>
           </p:cNvPr>
@@ -171,7 +171,7 @@
           <p:cNvPr id="3" name="字幕 2">
             <a:extLst>
               <a:ext uri="{FF2B5EF4-FFF2-40B4-BE49-F238E27FC236}">
-                <a16:creationId xmlns:a16="http://schemas.microsoft.com/office/drawing/2014/main" id="{9791711D-0FC1-3981-DAD9-C2F0C4596C87}"/>
+                <a16:creationId xmlns:a16="http://schemas.microsoft.com/office/drawing/2014/main" id="{8C2F5C4E-D805-03BB-506A-E703F17CBC6A}"/>
               </a:ext>
             </a:extLst>
           </p:cNvPr>
@@ -241,7 +241,7 @@
           <p:cNvPr id="4" name="日付プレースホルダー 3">
             <a:extLst>
               <a:ext uri="{FF2B5EF4-FFF2-40B4-BE49-F238E27FC236}">
-                <a16:creationId xmlns:a16="http://schemas.microsoft.com/office/drawing/2014/main" id="{8351DD3F-C750-F36A-C281-332904975566}"/>
+                <a16:creationId xmlns:a16="http://schemas.microsoft.com/office/drawing/2014/main" id="{8AE686EC-5F02-5A04-05EB-4713B2B904D4}"/>
               </a:ext>
             </a:extLst>
           </p:cNvPr>
@@ -257,7 +257,7 @@
           <a:bodyPr/>
           <a:lstStyle/>
           <a:p>
-            <a:fld id="{F765686E-8822-4A28-B208-F23F055F130A}" type="datetimeFigureOut">
+            <a:fld id="{19C2A274-EF11-4717-9D30-D04587E20F85}" type="datetimeFigureOut">
               <a:rPr kumimoji="1" lang="ja-JP" altLang="en-US" smtClean="0"/>
               <a:t>2026/7/30</a:t>
             </a:fld>
@@ -270,7 +270,7 @@
           <p:cNvPr id="5" name="フッター プレースホルダー 4">
             <a:extLst>
               <a:ext uri="{FF2B5EF4-FFF2-40B4-BE49-F238E27FC236}">
-                <a16:creationId xmlns:a16="http://schemas.microsoft.com/office/drawing/2014/main" id="{C67F90FD-702C-0DD1-69E5-08323A4A880D}"/>
+                <a16:creationId xmlns:a16="http://schemas.microsoft.com/office/drawing/2014/main" id="{C387C8A3-8513-5FA0-AD9F-A171E761A345}"/>
               </a:ext>
             </a:extLst>
           </p:cNvPr>
@@ -295,7 +295,7 @@
           <p:cNvPr id="6" name="スライド番号プレースホルダー 5">
             <a:extLst>
               <a:ext uri="{FF2B5EF4-FFF2-40B4-BE49-F238E27FC236}">
-                <a16:creationId xmlns:a16="http://schemas.microsoft.com/office/drawing/2014/main" id="{9238CE66-A591-CB5A-4551-252013D890D3}"/>
+                <a16:creationId xmlns:a16="http://schemas.microsoft.com/office/drawing/2014/main" id="{9B7E9776-7E91-7D34-7D5A-F3723DA7DDA1}"/>
               </a:ext>
             </a:extLst>
           </p:cNvPr>
@@ -311,7 +311,7 @@
           <a:bodyPr/>
           <a:lstStyle/>
           <a:p>
-            <a:fld id="{B3389CBB-EF0C-4A2C-B9F2-0FF5CD377FD3}" type="slidenum">
+            <a:fld id="{9A5D4659-9C11-485B-A48E-C3D39A810492}" type="slidenum">
               <a:rPr kumimoji="1" lang="ja-JP" altLang="en-US" smtClean="0"/>
               <a:t>‹#›</a:t>
             </a:fld>
@@ -322,7 +322,7 @@
     </p:spTree>
     <p:extLst>
       <p:ext uri="{BB962C8B-B14F-4D97-AF65-F5344CB8AC3E}">
-        <p14:creationId xmlns:p14="http://schemas.microsoft.com/office/powerpoint/2010/main" val="2848203284"/>
+        <p14:creationId xmlns:p14="http://schemas.microsoft.com/office/powerpoint/2010/main" val="4159949446"/>
       </p:ext>
     </p:extLst>
   </p:cSld>
@@ -354,7 +354,7 @@
           <p:cNvPr id="2" name="タイトル 1">
             <a:extLst>
               <a:ext uri="{FF2B5EF4-FFF2-40B4-BE49-F238E27FC236}">
-                <a16:creationId xmlns:a16="http://schemas.microsoft.com/office/drawing/2014/main" id="{05A73B07-58F3-C513-F92A-068C89B91F46}"/>
+                <a16:creationId xmlns:a16="http://schemas.microsoft.com/office/drawing/2014/main" id="{1436A468-C8F3-1F02-E09F-CFD31CFD0971}"/>
               </a:ext>
             </a:extLst>
           </p:cNvPr>
@@ -382,7 +382,7 @@
           <p:cNvPr id="3" name="縦書きテキスト プレースホルダー 2">
             <a:extLst>
               <a:ext uri="{FF2B5EF4-FFF2-40B4-BE49-F238E27FC236}">
-                <a16:creationId xmlns:a16="http://schemas.microsoft.com/office/drawing/2014/main" id="{621B0886-DBB6-083B-F9E3-6AECFB4936B2}"/>
+                <a16:creationId xmlns:a16="http://schemas.microsoft.com/office/drawing/2014/main" id="{E68A50D9-2139-A5C2-4A29-F670965FE5DF}"/>
               </a:ext>
             </a:extLst>
           </p:cNvPr>
@@ -471,7 +471,7 @@
           <p:cNvPr id="4" name="日付プレースホルダー 3">
             <a:extLst>
               <a:ext uri="{FF2B5EF4-FFF2-40B4-BE49-F238E27FC236}">
-                <a16:creationId xmlns:a16="http://schemas.microsoft.com/office/drawing/2014/main" id="{1CA4EFA4-49A5-A93B-6131-238D99D6E08E}"/>
+                <a16:creationId xmlns:a16="http://schemas.microsoft.com/office/drawing/2014/main" id="{3F17FBF1-4015-ECBE-78EC-1E98F969833D}"/>
               </a:ext>
             </a:extLst>
           </p:cNvPr>
@@ -487,7 +487,7 @@
           <a:bodyPr/>
           <a:lstStyle/>
           <a:p>
-            <a:fld id="{F765686E-8822-4A28-B208-F23F055F130A}" type="datetimeFigureOut">
+            <a:fld id="{19C2A274-EF11-4717-9D30-D04587E20F85}" type="datetimeFigureOut">
               <a:rPr kumimoji="1" lang="ja-JP" altLang="en-US" smtClean="0"/>
               <a:t>2026/7/30</a:t>
             </a:fld>
@@ -500,7 +500,7 @@
           <p:cNvPr id="5" name="フッター プレースホルダー 4">
             <a:extLst>
               <a:ext uri="{FF2B5EF4-FFF2-40B4-BE49-F238E27FC236}">
-                <a16:creationId xmlns:a16="http://schemas.microsoft.com/office/drawing/2014/main" id="{1E241C0A-F878-8CDF-DEA1-B5C39775E8D5}"/>
+                <a16:creationId xmlns:a16="http://schemas.microsoft.com/office/drawing/2014/main" id="{1F508380-A8DE-5415-413A-58FA10889341}"/>
               </a:ext>
             </a:extLst>
           </p:cNvPr>
@@ -525,7 +525,7 @@
           <p:cNvPr id="6" name="スライド番号プレースホルダー 5">
             <a:extLst>
               <a:ext uri="{FF2B5EF4-FFF2-40B4-BE49-F238E27FC236}">
-                <a16:creationId xmlns:a16="http://schemas.microsoft.com/office/drawing/2014/main" id="{5FA8BD13-DBA4-87D7-035F-6947D2B5A2E5}"/>
+                <a16:creationId xmlns:a16="http://schemas.microsoft.com/office/drawing/2014/main" id="{8C36A512-B9D5-A084-1007-E9D95F029259}"/>
               </a:ext>
             </a:extLst>
           </p:cNvPr>
@@ -541,7 +541,7 @@
           <a:bodyPr/>
           <a:lstStyle/>
           <a:p>
-            <a:fld id="{B3389CBB-EF0C-4A2C-B9F2-0FF5CD377FD3}" type="slidenum">
+            <a:fld id="{9A5D4659-9C11-485B-A48E-C3D39A810492}" type="slidenum">
               <a:rPr kumimoji="1" lang="ja-JP" altLang="en-US" smtClean="0"/>
               <a:t>‹#›</a:t>
             </a:fld>
@@ -552,7 +552,7 @@
     </p:spTree>
     <p:extLst>
       <p:ext uri="{BB962C8B-B14F-4D97-AF65-F5344CB8AC3E}">
-        <p14:creationId xmlns:p14="http://schemas.microsoft.com/office/powerpoint/2010/main" val="3118511283"/>
+        <p14:creationId xmlns:p14="http://schemas.microsoft.com/office/powerpoint/2010/main" val="1821387185"/>
       </p:ext>
     </p:extLst>
   </p:cSld>
@@ -584,7 +584,7 @@
           <p:cNvPr id="2" name="縦書きタイトル 1">
             <a:extLst>
               <a:ext uri="{FF2B5EF4-FFF2-40B4-BE49-F238E27FC236}">
-                <a16:creationId xmlns:a16="http://schemas.microsoft.com/office/drawing/2014/main" id="{4CA4089A-58D6-CC81-2F90-7D709F5733F0}"/>
+                <a16:creationId xmlns:a16="http://schemas.microsoft.com/office/drawing/2014/main" id="{E637001B-272B-A236-3D35-56AD6CC67DD2}"/>
               </a:ext>
             </a:extLst>
           </p:cNvPr>
@@ -617,7 +617,7 @@
           <p:cNvPr id="3" name="縦書きテキスト プレースホルダー 2">
             <a:extLst>
               <a:ext uri="{FF2B5EF4-FFF2-40B4-BE49-F238E27FC236}">
-                <a16:creationId xmlns:a16="http://schemas.microsoft.com/office/drawing/2014/main" id="{2045714B-C753-A274-BBD8-113B8252E498}"/>
+                <a16:creationId xmlns:a16="http://schemas.microsoft.com/office/drawing/2014/main" id="{385E6214-0291-2C3F-A7F4-875A98676277}"/>
               </a:ext>
             </a:extLst>
           </p:cNvPr>
@@ -711,7 +711,7 @@
           <p:cNvPr id="4" name="日付プレースホルダー 3">
             <a:extLst>
               <a:ext uri="{FF2B5EF4-FFF2-40B4-BE49-F238E27FC236}">
-                <a16:creationId xmlns:a16="http://schemas.microsoft.com/office/drawing/2014/main" id="{E1B6B42F-E53E-8BA0-07F2-EE2CC83FF291}"/>
+                <a16:creationId xmlns:a16="http://schemas.microsoft.com/office/drawing/2014/main" id="{E6D49E7E-2FBD-78C9-C4E6-9743A46A8FBB}"/>
               </a:ext>
             </a:extLst>
           </p:cNvPr>
@@ -727,7 +727,7 @@
           <a:bodyPr/>
           <a:lstStyle/>
           <a:p>
-            <a:fld id="{F765686E-8822-4A28-B208-F23F055F130A}" type="datetimeFigureOut">
+            <a:fld id="{19C2A274-EF11-4717-9D30-D04587E20F85}" type="datetimeFigureOut">
               <a:rPr kumimoji="1" lang="ja-JP" altLang="en-US" smtClean="0"/>
               <a:t>2026/7/30</a:t>
             </a:fld>
@@ -740,7 +740,7 @@
           <p:cNvPr id="5" name="フッター プレースホルダー 4">
             <a:extLst>
               <a:ext uri="{FF2B5EF4-FFF2-40B4-BE49-F238E27FC236}">
-                <a16:creationId xmlns:a16="http://schemas.microsoft.com/office/drawing/2014/main" id="{070A65DD-9C22-9220-D8BB-73542EB5D0D7}"/>
+                <a16:creationId xmlns:a16="http://schemas.microsoft.com/office/drawing/2014/main" id="{6B7F14F8-27F3-E4AA-F255-812A0579EC18}"/>
               </a:ext>
             </a:extLst>
           </p:cNvPr>
@@ -765,7 +765,7 @@
           <p:cNvPr id="6" name="スライド番号プレースホルダー 5">
             <a:extLst>
               <a:ext uri="{FF2B5EF4-FFF2-40B4-BE49-F238E27FC236}">
-                <a16:creationId xmlns:a16="http://schemas.microsoft.com/office/drawing/2014/main" id="{E7336324-A14D-F0D1-264F-BE5E957ADF87}"/>
+                <a16:creationId xmlns:a16="http://schemas.microsoft.com/office/drawing/2014/main" id="{58BD07E5-4D2E-9F04-C9FC-587075CAE2AA}"/>
               </a:ext>
             </a:extLst>
           </p:cNvPr>
@@ -781,7 +781,7 @@
           <a:bodyPr/>
           <a:lstStyle/>
           <a:p>
-            <a:fld id="{B3389CBB-EF0C-4A2C-B9F2-0FF5CD377FD3}" type="slidenum">
+            <a:fld id="{9A5D4659-9C11-485B-A48E-C3D39A810492}" type="slidenum">
               <a:rPr kumimoji="1" lang="ja-JP" altLang="en-US" smtClean="0"/>
               <a:t>‹#›</a:t>
             </a:fld>
@@ -792,7 +792,7 @@
     </p:spTree>
     <p:extLst>
       <p:ext uri="{BB962C8B-B14F-4D97-AF65-F5344CB8AC3E}">
-        <p14:creationId xmlns:p14="http://schemas.microsoft.com/office/powerpoint/2010/main" val="39612728"/>
+        <p14:creationId xmlns:p14="http://schemas.microsoft.com/office/powerpoint/2010/main" val="714188772"/>
       </p:ext>
     </p:extLst>
   </p:cSld>
@@ -824,7 +824,7 @@
           <p:cNvPr id="2" name="タイトル 1">
             <a:extLst>
               <a:ext uri="{FF2B5EF4-FFF2-40B4-BE49-F238E27FC236}">
-                <a16:creationId xmlns:a16="http://schemas.microsoft.com/office/drawing/2014/main" id="{AA2688B1-D5D6-F905-E115-0147E8703A4C}"/>
+                <a16:creationId xmlns:a16="http://schemas.microsoft.com/office/drawing/2014/main" id="{31D61A36-9BD7-33AB-29FD-ADB76D149A50}"/>
               </a:ext>
             </a:extLst>
           </p:cNvPr>
@@ -852,7 +852,7 @@
           <p:cNvPr id="3" name="コンテンツ プレースホルダー 2">
             <a:extLst>
               <a:ext uri="{FF2B5EF4-FFF2-40B4-BE49-F238E27FC236}">
-                <a16:creationId xmlns:a16="http://schemas.microsoft.com/office/drawing/2014/main" id="{726AF902-C8F4-8C53-73B1-DD749EB89E91}"/>
+                <a16:creationId xmlns:a16="http://schemas.microsoft.com/office/drawing/2014/main" id="{1D74A2B3-B94D-8406-FB12-B297D3244BDA}"/>
               </a:ext>
             </a:extLst>
           </p:cNvPr>
@@ -941,7 +941,7 @@
           <p:cNvPr id="4" name="日付プレースホルダー 3">
             <a:extLst>
               <a:ext uri="{FF2B5EF4-FFF2-40B4-BE49-F238E27FC236}">
-                <a16:creationId xmlns:a16="http://schemas.microsoft.com/office/drawing/2014/main" id="{D5E5F773-FE71-1929-F27E-36892691C67D}"/>
+                <a16:creationId xmlns:a16="http://schemas.microsoft.com/office/drawing/2014/main" id="{9F9E43D4-F841-C7A4-E737-B8F43E1D8332}"/>
               </a:ext>
             </a:extLst>
           </p:cNvPr>
@@ -957,7 +957,7 @@
           <a:bodyPr/>
           <a:lstStyle/>
           <a:p>
-            <a:fld id="{F765686E-8822-4A28-B208-F23F055F130A}" type="datetimeFigureOut">
+            <a:fld id="{19C2A274-EF11-4717-9D30-D04587E20F85}" type="datetimeFigureOut">
               <a:rPr kumimoji="1" lang="ja-JP" altLang="en-US" smtClean="0"/>
               <a:t>2026/7/30</a:t>
             </a:fld>
@@ -970,7 +970,7 @@
           <p:cNvPr id="5" name="フッター プレースホルダー 4">
             <a:extLst>
               <a:ext uri="{FF2B5EF4-FFF2-40B4-BE49-F238E27FC236}">
-                <a16:creationId xmlns:a16="http://schemas.microsoft.com/office/drawing/2014/main" id="{E9465E6F-0F38-C6FB-BDC2-D80ED7C05C15}"/>
+                <a16:creationId xmlns:a16="http://schemas.microsoft.com/office/drawing/2014/main" id="{751CEF20-3662-F5E8-113C-0047C4285303}"/>
               </a:ext>
             </a:extLst>
           </p:cNvPr>
@@ -995,7 +995,7 @@
           <p:cNvPr id="6" name="スライド番号プレースホルダー 5">
             <a:extLst>
               <a:ext uri="{FF2B5EF4-FFF2-40B4-BE49-F238E27FC236}">
-                <a16:creationId xmlns:a16="http://schemas.microsoft.com/office/drawing/2014/main" id="{6EABCBB7-E73F-F1FC-FB9E-C9B9BD740C6B}"/>
+                <a16:creationId xmlns:a16="http://schemas.microsoft.com/office/drawing/2014/main" id="{8E7C30C9-B0E6-BC56-59A7-9DCFB48F563D}"/>
               </a:ext>
             </a:extLst>
           </p:cNvPr>
@@ -1011,7 +1011,7 @@
           <a:bodyPr/>
           <a:lstStyle/>
           <a:p>
-            <a:fld id="{B3389CBB-EF0C-4A2C-B9F2-0FF5CD377FD3}" type="slidenum">
+            <a:fld id="{9A5D4659-9C11-485B-A48E-C3D39A810492}" type="slidenum">
               <a:rPr kumimoji="1" lang="ja-JP" altLang="en-US" smtClean="0"/>
               <a:t>‹#›</a:t>
             </a:fld>
@@ -1022,7 +1022,7 @@
     </p:spTree>
     <p:extLst>
       <p:ext uri="{BB962C8B-B14F-4D97-AF65-F5344CB8AC3E}">
-        <p14:creationId xmlns:p14="http://schemas.microsoft.com/office/powerpoint/2010/main" val="2304086763"/>
+        <p14:creationId xmlns:p14="http://schemas.microsoft.com/office/powerpoint/2010/main" val="4034606462"/>
       </p:ext>
     </p:extLst>
   </p:cSld>
@@ -1054,7 +1054,7 @@
           <p:cNvPr id="2" name="タイトル 1">
             <a:extLst>
               <a:ext uri="{FF2B5EF4-FFF2-40B4-BE49-F238E27FC236}">
-                <a16:creationId xmlns:a16="http://schemas.microsoft.com/office/drawing/2014/main" id="{E997B5A3-866E-6D94-ED30-824DB50DBB66}"/>
+                <a16:creationId xmlns:a16="http://schemas.microsoft.com/office/drawing/2014/main" id="{92F478FC-8E77-A5EA-2451-B10C764DD583}"/>
               </a:ext>
             </a:extLst>
           </p:cNvPr>
@@ -1091,7 +1091,7 @@
           <p:cNvPr id="3" name="テキスト プレースホルダー 2">
             <a:extLst>
               <a:ext uri="{FF2B5EF4-FFF2-40B4-BE49-F238E27FC236}">
-                <a16:creationId xmlns:a16="http://schemas.microsoft.com/office/drawing/2014/main" id="{E6AA5B6D-2D6B-B21D-D01E-33188E914D2E}"/>
+                <a16:creationId xmlns:a16="http://schemas.microsoft.com/office/drawing/2014/main" id="{FF7BF82F-BB1D-6E34-7C89-5F333055EF1C}"/>
               </a:ext>
             </a:extLst>
           </p:cNvPr>
@@ -1216,7 +1216,7 @@
           <p:cNvPr id="4" name="日付プレースホルダー 3">
             <a:extLst>
               <a:ext uri="{FF2B5EF4-FFF2-40B4-BE49-F238E27FC236}">
-                <a16:creationId xmlns:a16="http://schemas.microsoft.com/office/drawing/2014/main" id="{FBCDF9C8-171C-6C5A-6EF4-DF75A31BD591}"/>
+                <a16:creationId xmlns:a16="http://schemas.microsoft.com/office/drawing/2014/main" id="{84F09E58-6F5E-77F6-F5BF-ACB2D2EA1590}"/>
               </a:ext>
             </a:extLst>
           </p:cNvPr>
@@ -1232,7 +1232,7 @@
           <a:bodyPr/>
           <a:lstStyle/>
           <a:p>
-            <a:fld id="{F765686E-8822-4A28-B208-F23F055F130A}" type="datetimeFigureOut">
+            <a:fld id="{19C2A274-EF11-4717-9D30-D04587E20F85}" type="datetimeFigureOut">
               <a:rPr kumimoji="1" lang="ja-JP" altLang="en-US" smtClean="0"/>
               <a:t>2026/7/30</a:t>
             </a:fld>
@@ -1245,7 +1245,7 @@
           <p:cNvPr id="5" name="フッター プレースホルダー 4">
             <a:extLst>
               <a:ext uri="{FF2B5EF4-FFF2-40B4-BE49-F238E27FC236}">
-                <a16:creationId xmlns:a16="http://schemas.microsoft.com/office/drawing/2014/main" id="{D09725C0-6F4C-99DD-977B-EABE778B574C}"/>
+                <a16:creationId xmlns:a16="http://schemas.microsoft.com/office/drawing/2014/main" id="{BDF5C909-0294-C53A-D1EB-D49F388D0326}"/>
               </a:ext>
             </a:extLst>
           </p:cNvPr>
@@ -1270,7 +1270,7 @@
           <p:cNvPr id="6" name="スライド番号プレースホルダー 5">
             <a:extLst>
               <a:ext uri="{FF2B5EF4-FFF2-40B4-BE49-F238E27FC236}">
-                <a16:creationId xmlns:a16="http://schemas.microsoft.com/office/drawing/2014/main" id="{1AD8DD5E-CA73-BD16-8101-D76F1051C303}"/>
+                <a16:creationId xmlns:a16="http://schemas.microsoft.com/office/drawing/2014/main" id="{8D2A9B97-879A-3269-E136-66F8BB11B3B9}"/>
               </a:ext>
             </a:extLst>
           </p:cNvPr>
@@ -1286,7 +1286,7 @@
           <a:bodyPr/>
           <a:lstStyle/>
           <a:p>
-            <a:fld id="{B3389CBB-EF0C-4A2C-B9F2-0FF5CD377FD3}" type="slidenum">
+            <a:fld id="{9A5D4659-9C11-485B-A48E-C3D39A810492}" type="slidenum">
               <a:rPr kumimoji="1" lang="ja-JP" altLang="en-US" smtClean="0"/>
               <a:t>‹#›</a:t>
             </a:fld>
@@ -1297,7 +1297,7 @@
     </p:spTree>
     <p:extLst>
       <p:ext uri="{BB962C8B-B14F-4D97-AF65-F5344CB8AC3E}">
-        <p14:creationId xmlns:p14="http://schemas.microsoft.com/office/powerpoint/2010/main" val="2493785234"/>
+        <p14:creationId xmlns:p14="http://schemas.microsoft.com/office/powerpoint/2010/main" val="1190259402"/>
       </p:ext>
     </p:extLst>
   </p:cSld>
@@ -1329,7 +1329,7 @@
           <p:cNvPr id="2" name="タイトル 1">
             <a:extLst>
               <a:ext uri="{FF2B5EF4-FFF2-40B4-BE49-F238E27FC236}">
-                <a16:creationId xmlns:a16="http://schemas.microsoft.com/office/drawing/2014/main" id="{EDC5F60D-BBC3-079A-2BFD-43F3835E6332}"/>
+                <a16:creationId xmlns:a16="http://schemas.microsoft.com/office/drawing/2014/main" id="{4A963B46-42C0-E3C2-8044-58BB7E6C82E5}"/>
               </a:ext>
             </a:extLst>
           </p:cNvPr>
@@ -1357,7 +1357,7 @@
           <p:cNvPr id="3" name="コンテンツ プレースホルダー 2">
             <a:extLst>
               <a:ext uri="{FF2B5EF4-FFF2-40B4-BE49-F238E27FC236}">
-                <a16:creationId xmlns:a16="http://schemas.microsoft.com/office/drawing/2014/main" id="{DA368B47-AC71-B2E6-14CE-61790AEEFC69}"/>
+                <a16:creationId xmlns:a16="http://schemas.microsoft.com/office/drawing/2014/main" id="{8A44070D-9C27-CAD7-BDDF-B5578261C5F5}"/>
               </a:ext>
             </a:extLst>
           </p:cNvPr>
@@ -1451,7 +1451,7 @@
           <p:cNvPr id="4" name="コンテンツ プレースホルダー 3">
             <a:extLst>
               <a:ext uri="{FF2B5EF4-FFF2-40B4-BE49-F238E27FC236}">
-                <a16:creationId xmlns:a16="http://schemas.microsoft.com/office/drawing/2014/main" id="{596915C3-8B05-96AB-938D-179F4FB51B00}"/>
+                <a16:creationId xmlns:a16="http://schemas.microsoft.com/office/drawing/2014/main" id="{E45A456B-4A8C-5675-1610-064A3E4756CD}"/>
               </a:ext>
             </a:extLst>
           </p:cNvPr>
@@ -1545,7 +1545,7 @@
           <p:cNvPr id="5" name="日付プレースホルダー 4">
             <a:extLst>
               <a:ext uri="{FF2B5EF4-FFF2-40B4-BE49-F238E27FC236}">
-                <a16:creationId xmlns:a16="http://schemas.microsoft.com/office/drawing/2014/main" id="{003C1F12-5CC3-E1BB-CBC5-25EBBC99DE1A}"/>
+                <a16:creationId xmlns:a16="http://schemas.microsoft.com/office/drawing/2014/main" id="{3EB8BA27-807F-C8C8-C745-A6088D005A6C}"/>
               </a:ext>
             </a:extLst>
           </p:cNvPr>
@@ -1561,7 +1561,7 @@
           <a:bodyPr/>
           <a:lstStyle/>
           <a:p>
-            <a:fld id="{F765686E-8822-4A28-B208-F23F055F130A}" type="datetimeFigureOut">
+            <a:fld id="{19C2A274-EF11-4717-9D30-D04587E20F85}" type="datetimeFigureOut">
               <a:rPr kumimoji="1" lang="ja-JP" altLang="en-US" smtClean="0"/>
               <a:t>2026/7/30</a:t>
             </a:fld>
@@ -1574,7 +1574,7 @@
           <p:cNvPr id="6" name="フッター プレースホルダー 5">
             <a:extLst>
               <a:ext uri="{FF2B5EF4-FFF2-40B4-BE49-F238E27FC236}">
-                <a16:creationId xmlns:a16="http://schemas.microsoft.com/office/drawing/2014/main" id="{D71DFCC7-9D4B-2327-D711-E76E8BB9C1BC}"/>
+                <a16:creationId xmlns:a16="http://schemas.microsoft.com/office/drawing/2014/main" id="{B90B4ED1-57EF-F09B-4E97-53474147C241}"/>
               </a:ext>
             </a:extLst>
           </p:cNvPr>
@@ -1599,7 +1599,7 @@
           <p:cNvPr id="7" name="スライド番号プレースホルダー 6">
             <a:extLst>
               <a:ext uri="{FF2B5EF4-FFF2-40B4-BE49-F238E27FC236}">
-                <a16:creationId xmlns:a16="http://schemas.microsoft.com/office/drawing/2014/main" id="{105544DB-24E5-A02F-32A5-EB20BF6DA90B}"/>
+                <a16:creationId xmlns:a16="http://schemas.microsoft.com/office/drawing/2014/main" id="{4A3D150D-B7B9-DE43-8ADF-EFAE3708DE3D}"/>
               </a:ext>
             </a:extLst>
           </p:cNvPr>
@@ -1615,7 +1615,7 @@
           <a:bodyPr/>
           <a:lstStyle/>
           <a:p>
-            <a:fld id="{B3389CBB-EF0C-4A2C-B9F2-0FF5CD377FD3}" type="slidenum">
+            <a:fld id="{9A5D4659-9C11-485B-A48E-C3D39A810492}" type="slidenum">
               <a:rPr kumimoji="1" lang="ja-JP" altLang="en-US" smtClean="0"/>
               <a:t>‹#›</a:t>
             </a:fld>
@@ -1626,7 +1626,7 @@
     </p:spTree>
     <p:extLst>
       <p:ext uri="{BB962C8B-B14F-4D97-AF65-F5344CB8AC3E}">
-        <p14:creationId xmlns:p14="http://schemas.microsoft.com/office/powerpoint/2010/main" val="494772394"/>
+        <p14:creationId xmlns:p14="http://schemas.microsoft.com/office/powerpoint/2010/main" val="3724757686"/>
       </p:ext>
     </p:extLst>
   </p:cSld>
@@ -1658,7 +1658,7 @@
           <p:cNvPr id="2" name="タイトル 1">
             <a:extLst>
               <a:ext uri="{FF2B5EF4-FFF2-40B4-BE49-F238E27FC236}">
-                <a16:creationId xmlns:a16="http://schemas.microsoft.com/office/drawing/2014/main" id="{82921186-0D6B-CD77-3020-0C28315C7EAD}"/>
+                <a16:creationId xmlns:a16="http://schemas.microsoft.com/office/drawing/2014/main" id="{583A1797-43A7-247D-2EB5-F4120CADB6E0}"/>
               </a:ext>
             </a:extLst>
           </p:cNvPr>
@@ -1691,7 +1691,7 @@
           <p:cNvPr id="3" name="テキスト プレースホルダー 2">
             <a:extLst>
               <a:ext uri="{FF2B5EF4-FFF2-40B4-BE49-F238E27FC236}">
-                <a16:creationId xmlns:a16="http://schemas.microsoft.com/office/drawing/2014/main" id="{AB64B8F0-4F66-49E7-A6A4-9A887B6883BD}"/>
+                <a16:creationId xmlns:a16="http://schemas.microsoft.com/office/drawing/2014/main" id="{1B0363C3-B582-039B-4579-B555DA00DB2D}"/>
               </a:ext>
             </a:extLst>
           </p:cNvPr>
@@ -1762,7 +1762,7 @@
           <p:cNvPr id="4" name="コンテンツ プレースホルダー 3">
             <a:extLst>
               <a:ext uri="{FF2B5EF4-FFF2-40B4-BE49-F238E27FC236}">
-                <a16:creationId xmlns:a16="http://schemas.microsoft.com/office/drawing/2014/main" id="{DE1769B3-C806-1A63-11B8-2F4E91B73DFE}"/>
+                <a16:creationId xmlns:a16="http://schemas.microsoft.com/office/drawing/2014/main" id="{E5F3A015-E7EA-1C08-290B-E06F9B6C4141}"/>
               </a:ext>
             </a:extLst>
           </p:cNvPr>
@@ -1856,7 +1856,7 @@
           <p:cNvPr id="5" name="テキスト プレースホルダー 4">
             <a:extLst>
               <a:ext uri="{FF2B5EF4-FFF2-40B4-BE49-F238E27FC236}">
-                <a16:creationId xmlns:a16="http://schemas.microsoft.com/office/drawing/2014/main" id="{3006F241-6EEF-06E2-42A7-5D7B801FA037}"/>
+                <a16:creationId xmlns:a16="http://schemas.microsoft.com/office/drawing/2014/main" id="{3E7ECAD6-2C35-1489-0229-B991D9A69529}"/>
               </a:ext>
             </a:extLst>
           </p:cNvPr>
@@ -1927,7 +1927,7 @@
           <p:cNvPr id="6" name="コンテンツ プレースホルダー 5">
             <a:extLst>
               <a:ext uri="{FF2B5EF4-FFF2-40B4-BE49-F238E27FC236}">
-                <a16:creationId xmlns:a16="http://schemas.microsoft.com/office/drawing/2014/main" id="{007FFC50-8B76-981B-4FAF-B9DB275E4BDB}"/>
+                <a16:creationId xmlns:a16="http://schemas.microsoft.com/office/drawing/2014/main" id="{6A95A3C2-36FA-389A-63DD-ABA75D249C06}"/>
               </a:ext>
             </a:extLst>
           </p:cNvPr>
@@ -2021,7 +2021,7 @@
           <p:cNvPr id="7" name="日付プレースホルダー 6">
             <a:extLst>
               <a:ext uri="{FF2B5EF4-FFF2-40B4-BE49-F238E27FC236}">
-                <a16:creationId xmlns:a16="http://schemas.microsoft.com/office/drawing/2014/main" id="{38EB03F2-1F09-3263-74B0-7E15BF9D4E27}"/>
+                <a16:creationId xmlns:a16="http://schemas.microsoft.com/office/drawing/2014/main" id="{BC0104AA-C891-741B-4616-29D4497B6E0F}"/>
               </a:ext>
             </a:extLst>
           </p:cNvPr>
@@ -2037,7 +2037,7 @@
           <a:bodyPr/>
           <a:lstStyle/>
           <a:p>
-            <a:fld id="{F765686E-8822-4A28-B208-F23F055F130A}" type="datetimeFigureOut">
+            <a:fld id="{19C2A274-EF11-4717-9D30-D04587E20F85}" type="datetimeFigureOut">
               <a:rPr kumimoji="1" lang="ja-JP" altLang="en-US" smtClean="0"/>
               <a:t>2026/7/30</a:t>
             </a:fld>
@@ -2050,7 +2050,7 @@
           <p:cNvPr id="8" name="フッター プレースホルダー 7">
             <a:extLst>
               <a:ext uri="{FF2B5EF4-FFF2-40B4-BE49-F238E27FC236}">
-                <a16:creationId xmlns:a16="http://schemas.microsoft.com/office/drawing/2014/main" id="{41E45DCE-AC05-DA60-501B-9648802FD3E8}"/>
+                <a16:creationId xmlns:a16="http://schemas.microsoft.com/office/drawing/2014/main" id="{7607677E-099B-A89C-09D0-29BC4A4A6A95}"/>
               </a:ext>
             </a:extLst>
           </p:cNvPr>
@@ -2075,7 +2075,7 @@
           <p:cNvPr id="9" name="スライド番号プレースホルダー 8">
             <a:extLst>
               <a:ext uri="{FF2B5EF4-FFF2-40B4-BE49-F238E27FC236}">
-                <a16:creationId xmlns:a16="http://schemas.microsoft.com/office/drawing/2014/main" id="{8FAF727D-43EB-6451-230E-5D6DF0C5CF3A}"/>
+                <a16:creationId xmlns:a16="http://schemas.microsoft.com/office/drawing/2014/main" id="{7360B3D5-FA39-818C-42CF-8543ECFD1113}"/>
               </a:ext>
             </a:extLst>
           </p:cNvPr>
@@ -2091,7 +2091,7 @@
           <a:bodyPr/>
           <a:lstStyle/>
           <a:p>
-            <a:fld id="{B3389CBB-EF0C-4A2C-B9F2-0FF5CD377FD3}" type="slidenum">
+            <a:fld id="{9A5D4659-9C11-485B-A48E-C3D39A810492}" type="slidenum">
               <a:rPr kumimoji="1" lang="ja-JP" altLang="en-US" smtClean="0"/>
               <a:t>‹#›</a:t>
             </a:fld>
@@ -2102,7 +2102,7 @@
     </p:spTree>
     <p:extLst>
       <p:ext uri="{BB962C8B-B14F-4D97-AF65-F5344CB8AC3E}">
-        <p14:creationId xmlns:p14="http://schemas.microsoft.com/office/powerpoint/2010/main" val="861362384"/>
+        <p14:creationId xmlns:p14="http://schemas.microsoft.com/office/powerpoint/2010/main" val="21896756"/>
       </p:ext>
     </p:extLst>
   </p:cSld>
@@ -2134,7 +2134,7 @@
           <p:cNvPr id="2" name="タイトル 1">
             <a:extLst>
               <a:ext uri="{FF2B5EF4-FFF2-40B4-BE49-F238E27FC236}">
-                <a16:creationId xmlns:a16="http://schemas.microsoft.com/office/drawing/2014/main" id="{48B0825F-833A-A822-2940-8036574A21AB}"/>
+                <a16:creationId xmlns:a16="http://schemas.microsoft.com/office/drawing/2014/main" id="{8C2E80BD-5409-D59E-402A-DE4B03E026A1}"/>
               </a:ext>
             </a:extLst>
           </p:cNvPr>
@@ -2162,7 +2162,7 @@
           <p:cNvPr id="3" name="日付プレースホルダー 2">
             <a:extLst>
               <a:ext uri="{FF2B5EF4-FFF2-40B4-BE49-F238E27FC236}">
-                <a16:creationId xmlns:a16="http://schemas.microsoft.com/office/drawing/2014/main" id="{07F09F25-3338-AE44-7692-3663C1E50FFA}"/>
+                <a16:creationId xmlns:a16="http://schemas.microsoft.com/office/drawing/2014/main" id="{805E1DFE-5EAC-1869-EFFA-DCC846595A04}"/>
               </a:ext>
             </a:extLst>
           </p:cNvPr>
@@ -2178,7 +2178,7 @@
           <a:bodyPr/>
           <a:lstStyle/>
           <a:p>
-            <a:fld id="{F765686E-8822-4A28-B208-F23F055F130A}" type="datetimeFigureOut">
+            <a:fld id="{19C2A274-EF11-4717-9D30-D04587E20F85}" type="datetimeFigureOut">
               <a:rPr kumimoji="1" lang="ja-JP" altLang="en-US" smtClean="0"/>
               <a:t>2026/7/30</a:t>
             </a:fld>
@@ -2191,7 +2191,7 @@
           <p:cNvPr id="4" name="フッター プレースホルダー 3">
             <a:extLst>
               <a:ext uri="{FF2B5EF4-FFF2-40B4-BE49-F238E27FC236}">
-                <a16:creationId xmlns:a16="http://schemas.microsoft.com/office/drawing/2014/main" id="{47DDFE23-60B5-1AA5-47DA-D1A1C234F40B}"/>
+                <a16:creationId xmlns:a16="http://schemas.microsoft.com/office/drawing/2014/main" id="{CB65757B-2F9C-F36E-516B-F9F1E1AE75F3}"/>
               </a:ext>
             </a:extLst>
           </p:cNvPr>
@@ -2216,7 +2216,7 @@
           <p:cNvPr id="5" name="スライド番号プレースホルダー 4">
             <a:extLst>
               <a:ext uri="{FF2B5EF4-FFF2-40B4-BE49-F238E27FC236}">
-                <a16:creationId xmlns:a16="http://schemas.microsoft.com/office/drawing/2014/main" id="{F7DE0705-0A30-A0F3-4F30-0A87EFEA1448}"/>
+                <a16:creationId xmlns:a16="http://schemas.microsoft.com/office/drawing/2014/main" id="{D78DD172-5BBE-BCCE-B7A7-79BA1324D813}"/>
               </a:ext>
             </a:extLst>
           </p:cNvPr>
@@ -2232,7 +2232,7 @@
           <a:bodyPr/>
           <a:lstStyle/>
           <a:p>
-            <a:fld id="{B3389CBB-EF0C-4A2C-B9F2-0FF5CD377FD3}" type="slidenum">
+            <a:fld id="{9A5D4659-9C11-485B-A48E-C3D39A810492}" type="slidenum">
               <a:rPr kumimoji="1" lang="ja-JP" altLang="en-US" smtClean="0"/>
               <a:t>‹#›</a:t>
             </a:fld>
@@ -2243,7 +2243,7 @@
     </p:spTree>
     <p:extLst>
       <p:ext uri="{BB962C8B-B14F-4D97-AF65-F5344CB8AC3E}">
-        <p14:creationId xmlns:p14="http://schemas.microsoft.com/office/powerpoint/2010/main" val="3828505718"/>
+        <p14:creationId xmlns:p14="http://schemas.microsoft.com/office/powerpoint/2010/main" val="931532458"/>
       </p:ext>
     </p:extLst>
   </p:cSld>
@@ -2275,7 +2275,7 @@
           <p:cNvPr id="2" name="日付プレースホルダー 1">
             <a:extLst>
               <a:ext uri="{FF2B5EF4-FFF2-40B4-BE49-F238E27FC236}">
-                <a16:creationId xmlns:a16="http://schemas.microsoft.com/office/drawing/2014/main" id="{293AB5C6-B4C0-F945-E08E-0D336C07180E}"/>
+                <a16:creationId xmlns:a16="http://schemas.microsoft.com/office/drawing/2014/main" id="{672329F3-58C5-5E08-585F-F9C413CC668B}"/>
               </a:ext>
             </a:extLst>
           </p:cNvPr>
@@ -2291,7 +2291,7 @@
           <a:bodyPr/>
           <a:lstStyle/>
           <a:p>
-            <a:fld id="{F765686E-8822-4A28-B208-F23F055F130A}" type="datetimeFigureOut">
+            <a:fld id="{19C2A274-EF11-4717-9D30-D04587E20F85}" type="datetimeFigureOut">
               <a:rPr kumimoji="1" lang="ja-JP" altLang="en-US" smtClean="0"/>
               <a:t>2026/7/30</a:t>
             </a:fld>
@@ -2304,7 +2304,7 @@
           <p:cNvPr id="3" name="フッター プレースホルダー 2">
             <a:extLst>
               <a:ext uri="{FF2B5EF4-FFF2-40B4-BE49-F238E27FC236}">
-                <a16:creationId xmlns:a16="http://schemas.microsoft.com/office/drawing/2014/main" id="{408C580E-389C-A612-2F3B-928301FDB574}"/>
+                <a16:creationId xmlns:a16="http://schemas.microsoft.com/office/drawing/2014/main" id="{C0DCE712-793E-C43E-4175-CCE81903DB47}"/>
               </a:ext>
             </a:extLst>
           </p:cNvPr>
@@ -2329,7 +2329,7 @@
           <p:cNvPr id="4" name="スライド番号プレースホルダー 3">
             <a:extLst>
               <a:ext uri="{FF2B5EF4-FFF2-40B4-BE49-F238E27FC236}">
-                <a16:creationId xmlns:a16="http://schemas.microsoft.com/office/drawing/2014/main" id="{EE67E81D-2729-05F4-9AE2-7B0BC3328B96}"/>
+                <a16:creationId xmlns:a16="http://schemas.microsoft.com/office/drawing/2014/main" id="{2CC6846F-E2D8-0390-3FE1-B752F0CBCC54}"/>
               </a:ext>
             </a:extLst>
           </p:cNvPr>
@@ -2345,7 +2345,7 @@
           <a:bodyPr/>
           <a:lstStyle/>
           <a:p>
-            <a:fld id="{B3389CBB-EF0C-4A2C-B9F2-0FF5CD377FD3}" type="slidenum">
+            <a:fld id="{9A5D4659-9C11-485B-A48E-C3D39A810492}" type="slidenum">
               <a:rPr kumimoji="1" lang="ja-JP" altLang="en-US" smtClean="0"/>
               <a:t>‹#›</a:t>
             </a:fld>
@@ -2356,7 +2356,7 @@
     </p:spTree>
     <p:extLst>
       <p:ext uri="{BB962C8B-B14F-4D97-AF65-F5344CB8AC3E}">
-        <p14:creationId xmlns:p14="http://schemas.microsoft.com/office/powerpoint/2010/main" val="397137910"/>
+        <p14:creationId xmlns:p14="http://schemas.microsoft.com/office/powerpoint/2010/main" val="2391685224"/>
       </p:ext>
     </p:extLst>
   </p:cSld>
@@ -2388,7 +2388,7 @@
           <p:cNvPr id="2" name="タイトル 1">
             <a:extLst>
               <a:ext uri="{FF2B5EF4-FFF2-40B4-BE49-F238E27FC236}">
-                <a16:creationId xmlns:a16="http://schemas.microsoft.com/office/drawing/2014/main" id="{29E124A0-99CD-38A3-DA69-88C06EDEA3FE}"/>
+                <a16:creationId xmlns:a16="http://schemas.microsoft.com/office/drawing/2014/main" id="{62A3FA41-6EE0-9334-0369-02A84086A1A7}"/>
               </a:ext>
             </a:extLst>
           </p:cNvPr>
@@ -2425,7 +2425,7 @@
           <p:cNvPr id="3" name="コンテンツ プレースホルダー 2">
             <a:extLst>
               <a:ext uri="{FF2B5EF4-FFF2-40B4-BE49-F238E27FC236}">
-                <a16:creationId xmlns:a16="http://schemas.microsoft.com/office/drawing/2014/main" id="{40D75651-60C0-048B-DFC9-AC3EF7E19677}"/>
+                <a16:creationId xmlns:a16="http://schemas.microsoft.com/office/drawing/2014/main" id="{7F989F3A-1727-699F-5B66-07DFB801698F}"/>
               </a:ext>
             </a:extLst>
           </p:cNvPr>
@@ -2547,7 +2547,7 @@
           <p:cNvPr id="4" name="テキスト プレースホルダー 3">
             <a:extLst>
               <a:ext uri="{FF2B5EF4-FFF2-40B4-BE49-F238E27FC236}">
-                <a16:creationId xmlns:a16="http://schemas.microsoft.com/office/drawing/2014/main" id="{F8C50E83-E83C-EA9C-CDD5-48B73F993E05}"/>
+                <a16:creationId xmlns:a16="http://schemas.microsoft.com/office/drawing/2014/main" id="{A3CF7A76-6825-9EE3-C3BF-F59B700CF11C}"/>
               </a:ext>
             </a:extLst>
           </p:cNvPr>
@@ -2618,7 +2618,7 @@
           <p:cNvPr id="5" name="日付プレースホルダー 4">
             <a:extLst>
               <a:ext uri="{FF2B5EF4-FFF2-40B4-BE49-F238E27FC236}">
-                <a16:creationId xmlns:a16="http://schemas.microsoft.com/office/drawing/2014/main" id="{442C551D-F926-5E40-68C3-B59A191F1E2E}"/>
+                <a16:creationId xmlns:a16="http://schemas.microsoft.com/office/drawing/2014/main" id="{0BCB04C3-42E9-CF05-FEA7-717E4219BFAA}"/>
               </a:ext>
             </a:extLst>
           </p:cNvPr>
@@ -2634,7 +2634,7 @@
           <a:bodyPr/>
           <a:lstStyle/>
           <a:p>
-            <a:fld id="{F765686E-8822-4A28-B208-F23F055F130A}" type="datetimeFigureOut">
+            <a:fld id="{19C2A274-EF11-4717-9D30-D04587E20F85}" type="datetimeFigureOut">
               <a:rPr kumimoji="1" lang="ja-JP" altLang="en-US" smtClean="0"/>
               <a:t>2026/7/30</a:t>
             </a:fld>
@@ -2647,7 +2647,7 @@
           <p:cNvPr id="6" name="フッター プレースホルダー 5">
             <a:extLst>
               <a:ext uri="{FF2B5EF4-FFF2-40B4-BE49-F238E27FC236}">
-                <a16:creationId xmlns:a16="http://schemas.microsoft.com/office/drawing/2014/main" id="{A0A67FE8-BD08-9339-13E9-2260A1E0E148}"/>
+                <a16:creationId xmlns:a16="http://schemas.microsoft.com/office/drawing/2014/main" id="{96C0CBAD-5010-3DA5-3ECE-6DE69D9DBF69}"/>
               </a:ext>
             </a:extLst>
           </p:cNvPr>
@@ -2672,7 +2672,7 @@
           <p:cNvPr id="7" name="スライド番号プレースホルダー 6">
             <a:extLst>
               <a:ext uri="{FF2B5EF4-FFF2-40B4-BE49-F238E27FC236}">
-                <a16:creationId xmlns:a16="http://schemas.microsoft.com/office/drawing/2014/main" id="{1FE9F3AC-77C2-C0CA-67AD-583A599F2F3E}"/>
+                <a16:creationId xmlns:a16="http://schemas.microsoft.com/office/drawing/2014/main" id="{07D36D41-F78E-F810-1589-D8FF1FD638C5}"/>
               </a:ext>
             </a:extLst>
           </p:cNvPr>
@@ -2688,7 +2688,7 @@
           <a:bodyPr/>
           <a:lstStyle/>
           <a:p>
-            <a:fld id="{B3389CBB-EF0C-4A2C-B9F2-0FF5CD377FD3}" type="slidenum">
+            <a:fld id="{9A5D4659-9C11-485B-A48E-C3D39A810492}" type="slidenum">
               <a:rPr kumimoji="1" lang="ja-JP" altLang="en-US" smtClean="0"/>
               <a:t>‹#›</a:t>
             </a:fld>
@@ -2699,7 +2699,7 @@
     </p:spTree>
     <p:extLst>
       <p:ext uri="{BB962C8B-B14F-4D97-AF65-F5344CB8AC3E}">
-        <p14:creationId xmlns:p14="http://schemas.microsoft.com/office/powerpoint/2010/main" val="1588241037"/>
+        <p14:creationId xmlns:p14="http://schemas.microsoft.com/office/powerpoint/2010/main" val="4060987311"/>
       </p:ext>
     </p:extLst>
   </p:cSld>
@@ -2731,7 +2731,7 @@
           <p:cNvPr id="2" name="タイトル 1">
             <a:extLst>
               <a:ext uri="{FF2B5EF4-FFF2-40B4-BE49-F238E27FC236}">
-                <a16:creationId xmlns:a16="http://schemas.microsoft.com/office/drawing/2014/main" id="{E0E95EF7-E225-11F2-D1A2-1E4D9AE26451}"/>
+                <a16:creationId xmlns:a16="http://schemas.microsoft.com/office/drawing/2014/main" id="{0FAE424C-5FE3-13E6-ED8B-C73DF69E8A8C}"/>
               </a:ext>
             </a:extLst>
           </p:cNvPr>
@@ -2768,7 +2768,7 @@
           <p:cNvPr id="3" name="図プレースホルダー 2">
             <a:extLst>
               <a:ext uri="{FF2B5EF4-FFF2-40B4-BE49-F238E27FC236}">
-                <a16:creationId xmlns:a16="http://schemas.microsoft.com/office/drawing/2014/main" id="{E167678A-6581-8E34-D350-2944E9346DCE}"/>
+                <a16:creationId xmlns:a16="http://schemas.microsoft.com/office/drawing/2014/main" id="{BBC9D590-B857-12DD-D45E-A8C65905A74E}"/>
               </a:ext>
             </a:extLst>
           </p:cNvPr>
@@ -2835,7 +2835,7 @@
           <p:cNvPr id="4" name="テキスト プレースホルダー 3">
             <a:extLst>
               <a:ext uri="{FF2B5EF4-FFF2-40B4-BE49-F238E27FC236}">
-                <a16:creationId xmlns:a16="http://schemas.microsoft.com/office/drawing/2014/main" id="{B9A6560B-B22F-DBFA-78E8-480A46AC50E9}"/>
+                <a16:creationId xmlns:a16="http://schemas.microsoft.com/office/drawing/2014/main" id="{3ED2832D-9667-0724-C08D-24086DDE25F5}"/>
               </a:ext>
             </a:extLst>
           </p:cNvPr>
@@ -2906,7 +2906,7 @@
           <p:cNvPr id="5" name="日付プレースホルダー 4">
             <a:extLst>
               <a:ext uri="{FF2B5EF4-FFF2-40B4-BE49-F238E27FC236}">
-                <a16:creationId xmlns:a16="http://schemas.microsoft.com/office/drawing/2014/main" id="{F219A000-2A2A-04C9-C0C4-8602859DAE35}"/>
+                <a16:creationId xmlns:a16="http://schemas.microsoft.com/office/drawing/2014/main" id="{6A3CC9C1-B6B1-895E-5F38-81D021A93E04}"/>
               </a:ext>
             </a:extLst>
           </p:cNvPr>
@@ -2922,7 +2922,7 @@
           <a:bodyPr/>
           <a:lstStyle/>
           <a:p>
-            <a:fld id="{F765686E-8822-4A28-B208-F23F055F130A}" type="datetimeFigureOut">
+            <a:fld id="{19C2A274-EF11-4717-9D30-D04587E20F85}" type="datetimeFigureOut">
               <a:rPr kumimoji="1" lang="ja-JP" altLang="en-US" smtClean="0"/>
               <a:t>2026/7/30</a:t>
             </a:fld>
@@ -2935,7 +2935,7 @@
           <p:cNvPr id="6" name="フッター プレースホルダー 5">
             <a:extLst>
               <a:ext uri="{FF2B5EF4-FFF2-40B4-BE49-F238E27FC236}">
-                <a16:creationId xmlns:a16="http://schemas.microsoft.com/office/drawing/2014/main" id="{D4A14256-82F6-2D29-AA65-A04639E5CD1F}"/>
+                <a16:creationId xmlns:a16="http://schemas.microsoft.com/office/drawing/2014/main" id="{4DF86CB2-B00D-974E-8648-6990B2B05FFD}"/>
               </a:ext>
             </a:extLst>
           </p:cNvPr>
@@ -2960,7 +2960,7 @@
           <p:cNvPr id="7" name="スライド番号プレースホルダー 6">
             <a:extLst>
               <a:ext uri="{FF2B5EF4-FFF2-40B4-BE49-F238E27FC236}">
-                <a16:creationId xmlns:a16="http://schemas.microsoft.com/office/drawing/2014/main" id="{E8C43736-0D97-7323-A76B-4754788563A8}"/>
+                <a16:creationId xmlns:a16="http://schemas.microsoft.com/office/drawing/2014/main" id="{0FFDF9FA-CCE9-1255-FEE4-2A1D6AB243CC}"/>
               </a:ext>
             </a:extLst>
           </p:cNvPr>
@@ -2976,7 +2976,7 @@
           <a:bodyPr/>
           <a:lstStyle/>
           <a:p>
-            <a:fld id="{B3389CBB-EF0C-4A2C-B9F2-0FF5CD377FD3}" type="slidenum">
+            <a:fld id="{9A5D4659-9C11-485B-A48E-C3D39A810492}" type="slidenum">
               <a:rPr kumimoji="1" lang="ja-JP" altLang="en-US" smtClean="0"/>
               <a:t>‹#›</a:t>
             </a:fld>
@@ -2987,7 +2987,7 @@
     </p:spTree>
     <p:extLst>
       <p:ext uri="{BB962C8B-B14F-4D97-AF65-F5344CB8AC3E}">
-        <p14:creationId xmlns:p14="http://schemas.microsoft.com/office/powerpoint/2010/main" val="3893086506"/>
+        <p14:creationId xmlns:p14="http://schemas.microsoft.com/office/powerpoint/2010/main" val="178430761"/>
       </p:ext>
     </p:extLst>
   </p:cSld>
@@ -3024,7 +3024,7 @@
           <p:cNvPr id="2" name="タイトル プレースホルダー 1">
             <a:extLst>
               <a:ext uri="{FF2B5EF4-FFF2-40B4-BE49-F238E27FC236}">
-                <a16:creationId xmlns:a16="http://schemas.microsoft.com/office/drawing/2014/main" id="{4CC1F396-417D-E25B-79CD-3C9684642B62}"/>
+                <a16:creationId xmlns:a16="http://schemas.microsoft.com/office/drawing/2014/main" id="{F0B4A4F8-AF92-8666-F467-484366CD0061}"/>
               </a:ext>
             </a:extLst>
           </p:cNvPr>
@@ -3062,7 +3062,7 @@
           <p:cNvPr id="3" name="テキスト プレースホルダー 2">
             <a:extLst>
               <a:ext uri="{FF2B5EF4-FFF2-40B4-BE49-F238E27FC236}">
-                <a16:creationId xmlns:a16="http://schemas.microsoft.com/office/drawing/2014/main" id="{E4ED8C1B-5F95-5071-B21E-148CFB722FB9}"/>
+                <a16:creationId xmlns:a16="http://schemas.microsoft.com/office/drawing/2014/main" id="{E97268E5-ED14-6DFF-6A54-4AB00A5B7412}"/>
               </a:ext>
             </a:extLst>
           </p:cNvPr>
@@ -3161,7 +3161,7 @@
           <p:cNvPr id="4" name="日付プレースホルダー 3">
             <a:extLst>
               <a:ext uri="{FF2B5EF4-FFF2-40B4-BE49-F238E27FC236}">
-                <a16:creationId xmlns:a16="http://schemas.microsoft.com/office/drawing/2014/main" id="{3A9DE4A7-E562-CF78-D617-EECEEB97E850}"/>
+                <a16:creationId xmlns:a16="http://schemas.microsoft.com/office/drawing/2014/main" id="{AD2180FF-9193-FEFF-8771-9C080009D67D}"/>
               </a:ext>
             </a:extLst>
           </p:cNvPr>
@@ -3195,7 +3195,7 @@
             </a:lvl1pPr>
           </a:lstStyle>
           <a:p>
-            <a:fld id="{F765686E-8822-4A28-B208-F23F055F130A}" type="datetimeFigureOut">
+            <a:fld id="{19C2A274-EF11-4717-9D30-D04587E20F85}" type="datetimeFigureOut">
               <a:rPr kumimoji="1" lang="ja-JP" altLang="en-US" smtClean="0"/>
               <a:t>2026/7/30</a:t>
             </a:fld>
@@ -3208,7 +3208,7 @@
           <p:cNvPr id="5" name="フッター プレースホルダー 4">
             <a:extLst>
               <a:ext uri="{FF2B5EF4-FFF2-40B4-BE49-F238E27FC236}">
-                <a16:creationId xmlns:a16="http://schemas.microsoft.com/office/drawing/2014/main" id="{47BA14C9-7367-14C0-676F-5DA00D63DFFC}"/>
+                <a16:creationId xmlns:a16="http://schemas.microsoft.com/office/drawing/2014/main" id="{0DCDA9AD-58CB-9A55-50F9-BC8C50342E68}"/>
               </a:ext>
             </a:extLst>
           </p:cNvPr>
@@ -3251,7 +3251,7 @@
           <p:cNvPr id="6" name="スライド番号プレースホルダー 5">
             <a:extLst>
               <a:ext uri="{FF2B5EF4-FFF2-40B4-BE49-F238E27FC236}">
-                <a16:creationId xmlns:a16="http://schemas.microsoft.com/office/drawing/2014/main" id="{0013D555-1FF7-D102-584E-010A8E3521BC}"/>
+                <a16:creationId xmlns:a16="http://schemas.microsoft.com/office/drawing/2014/main" id="{EB65063A-DE42-9F85-EB92-CD3E63BD1157}"/>
               </a:ext>
             </a:extLst>
           </p:cNvPr>
@@ -3285,7 +3285,7 @@
             </a:lvl1pPr>
           </a:lstStyle>
           <a:p>
-            <a:fld id="{B3389CBB-EF0C-4A2C-B9F2-0FF5CD377FD3}" type="slidenum">
+            <a:fld id="{9A5D4659-9C11-485B-A48E-C3D39A810492}" type="slidenum">
               <a:rPr kumimoji="1" lang="ja-JP" altLang="en-US" smtClean="0"/>
               <a:t>‹#›</a:t>
             </a:fld>
@@ -3296,7 +3296,7 @@
     </p:spTree>
     <p:extLst>
       <p:ext uri="{BB962C8B-B14F-4D97-AF65-F5344CB8AC3E}">
-        <p14:creationId xmlns:p14="http://schemas.microsoft.com/office/powerpoint/2010/main" val="1476315966"/>
+        <p14:creationId xmlns:p14="http://schemas.microsoft.com/office/powerpoint/2010/main" val="3355102628"/>
       </p:ext>
     </p:extLst>
   </p:cSld>
@@ -3619,7 +3619,7 @@
           <p:cNvPr id="2" name="テキスト ボックス 1">
             <a:extLst>
               <a:ext uri="{FF2B5EF4-FFF2-40B4-BE49-F238E27FC236}">
-                <a16:creationId xmlns:a16="http://schemas.microsoft.com/office/drawing/2014/main" id="{8FAEDA68-F0FB-EE4F-4D20-2CF3457D818F}"/>
+                <a16:creationId xmlns:a16="http://schemas.microsoft.com/office/drawing/2014/main" id="{0CFED15A-2523-92EF-CB3B-6631487EFC87}"/>
               </a:ext>
             </a:extLst>
           </p:cNvPr>
@@ -3665,7 +3665,7 @@
           <p:cNvPr id="3" name="テキスト ボックス 2">
             <a:extLst>
               <a:ext uri="{FF2B5EF4-FFF2-40B4-BE49-F238E27FC236}">
-                <a16:creationId xmlns:a16="http://schemas.microsoft.com/office/drawing/2014/main" id="{7DC506FB-4FE6-D5D6-4706-589B41574262}"/>
+                <a16:creationId xmlns:a16="http://schemas.microsoft.com/office/drawing/2014/main" id="{56DE9C70-F084-35E5-EBDE-8D8CE6FD9D3F}"/>
               </a:ext>
             </a:extLst>
           </p:cNvPr>
@@ -3714,7 +3714,7 @@
           <p:cNvPr id="4" name="テキスト ボックス 3">
             <a:extLst>
               <a:ext uri="{FF2B5EF4-FFF2-40B4-BE49-F238E27FC236}">
-                <a16:creationId xmlns:a16="http://schemas.microsoft.com/office/drawing/2014/main" id="{8649AFD1-6C82-D1DA-F58E-C605C64E0EC3}"/>
+                <a16:creationId xmlns:a16="http://schemas.microsoft.com/office/drawing/2014/main" id="{71F17B16-EC02-086B-E299-A8EF3D931807}"/>
               </a:ext>
             </a:extLst>
           </p:cNvPr>
@@ -3754,7 +3754,7 @@
           <p:cNvPr id="5" name="テキスト ボックス 4">
             <a:extLst>
               <a:ext uri="{FF2B5EF4-FFF2-40B4-BE49-F238E27FC236}">
-                <a16:creationId xmlns:a16="http://schemas.microsoft.com/office/drawing/2014/main" id="{3DAF813A-5A6D-90E2-6C27-226D4C5D1638}"/>
+                <a16:creationId xmlns:a16="http://schemas.microsoft.com/office/drawing/2014/main" id="{72F2F38B-8839-10E0-D7BA-08ADDE508B31}"/>
               </a:ext>
             </a:extLst>
           </p:cNvPr>
@@ -3801,7 +3801,7 @@
             <a:hlinkClick r:id="" action="ppaction://media"/>
             <a:extLst>
               <a:ext uri="{FF2B5EF4-FFF2-40B4-BE49-F238E27FC236}">
-                <a16:creationId xmlns:a16="http://schemas.microsoft.com/office/drawing/2014/main" id="{DB8FC530-4CB6-BA9A-48DC-307F905D8FB4}"/>
+                <a16:creationId xmlns:a16="http://schemas.microsoft.com/office/drawing/2014/main" id="{275BD8C8-E838-0788-CA29-1DD250012FFF}"/>
               </a:ext>
             </a:extLst>
           </p:cNvPr>
@@ -3836,7 +3836,7 @@
     </p:spTree>
     <p:extLst>
       <p:ext uri="{BB962C8B-B14F-4D97-AF65-F5344CB8AC3E}">
-        <p14:creationId xmlns:p14="http://schemas.microsoft.com/office/powerpoint/2010/main" val="284244947"/>
+        <p14:creationId xmlns:p14="http://schemas.microsoft.com/office/powerpoint/2010/main" val="2423890974"/>
       </p:ext>
     </p:extLst>
   </p:cSld>
@@ -3960,7 +3960,7 @@
           <p:cNvPr id="2" name="テキスト ボックス 1">
             <a:extLst>
               <a:ext uri="{FF2B5EF4-FFF2-40B4-BE49-F238E27FC236}">
-                <a16:creationId xmlns:a16="http://schemas.microsoft.com/office/drawing/2014/main" id="{E0ECB800-6983-FD57-EC72-3605B68DEDE3}"/>
+                <a16:creationId xmlns:a16="http://schemas.microsoft.com/office/drawing/2014/main" id="{99EBB8CD-1DCA-54C5-396B-44F76AF68E90}"/>
               </a:ext>
             </a:extLst>
           </p:cNvPr>
@@ -4006,7 +4006,7 @@
           <p:cNvPr id="3" name="テキスト ボックス 2">
             <a:extLst>
               <a:ext uri="{FF2B5EF4-FFF2-40B4-BE49-F238E27FC236}">
-                <a16:creationId xmlns:a16="http://schemas.microsoft.com/office/drawing/2014/main" id="{F43795DA-DAB9-FC8A-204C-F7873309B194}"/>
+                <a16:creationId xmlns:a16="http://schemas.microsoft.com/office/drawing/2014/main" id="{5341079C-9A16-D443-4A58-E88AC02E5B8D}"/>
               </a:ext>
             </a:extLst>
           </p:cNvPr>
@@ -4046,7 +4046,7 @@
           <p:cNvPr id="4" name="テキスト ボックス 3">
             <a:extLst>
               <a:ext uri="{FF2B5EF4-FFF2-40B4-BE49-F238E27FC236}">
-                <a16:creationId xmlns:a16="http://schemas.microsoft.com/office/drawing/2014/main" id="{45041F91-D013-9C1F-FB00-CC71C936E56A}"/>
+                <a16:creationId xmlns:a16="http://schemas.microsoft.com/office/drawing/2014/main" id="{04D16397-C104-24AF-6F13-50176293C0C4}"/>
               </a:ext>
             </a:extLst>
           </p:cNvPr>
@@ -4110,7 +4110,7 @@
           <p:cNvPr id="5" name="テキスト ボックス 4">
             <a:extLst>
               <a:ext uri="{FF2B5EF4-FFF2-40B4-BE49-F238E27FC236}">
-                <a16:creationId xmlns:a16="http://schemas.microsoft.com/office/drawing/2014/main" id="{2286C474-1881-EC4D-0734-159E5F9C4752}"/>
+                <a16:creationId xmlns:a16="http://schemas.microsoft.com/office/drawing/2014/main" id="{41DF26B7-8CE7-295D-034E-0ED001FAE247}"/>
               </a:ext>
             </a:extLst>
           </p:cNvPr>
@@ -4157,7 +4157,7 @@
             <a:hlinkClick r:id="" action="ppaction://media"/>
             <a:extLst>
               <a:ext uri="{FF2B5EF4-FFF2-40B4-BE49-F238E27FC236}">
-                <a16:creationId xmlns:a16="http://schemas.microsoft.com/office/drawing/2014/main" id="{CDCDE431-50EA-C24E-6142-CB10834BA010}"/>
+                <a16:creationId xmlns:a16="http://schemas.microsoft.com/office/drawing/2014/main" id="{5D24D73A-B87B-6D30-8514-108D41CAC63B}"/>
               </a:ext>
             </a:extLst>
           </p:cNvPr>
@@ -4192,7 +4192,7 @@
     </p:spTree>
     <p:extLst>
       <p:ext uri="{BB962C8B-B14F-4D97-AF65-F5344CB8AC3E}">
-        <p14:creationId xmlns:p14="http://schemas.microsoft.com/office/powerpoint/2010/main" val="3852404208"/>
+        <p14:creationId xmlns:p14="http://schemas.microsoft.com/office/powerpoint/2010/main" val="3952994153"/>
       </p:ext>
     </p:extLst>
   </p:cSld>
@@ -4316,7 +4316,7 @@
           <p:cNvPr id="2" name="テキスト ボックス 1">
             <a:extLst>
               <a:ext uri="{FF2B5EF4-FFF2-40B4-BE49-F238E27FC236}">
-                <a16:creationId xmlns:a16="http://schemas.microsoft.com/office/drawing/2014/main" id="{0820A86C-88DC-7E7C-E5EB-98EC36E0E005}"/>
+                <a16:creationId xmlns:a16="http://schemas.microsoft.com/office/drawing/2014/main" id="{009A23F4-96B6-7AC2-ED79-E107CD1D175A}"/>
               </a:ext>
             </a:extLst>
           </p:cNvPr>
@@ -4362,7 +4362,7 @@
           <p:cNvPr id="3" name="テキスト ボックス 2">
             <a:extLst>
               <a:ext uri="{FF2B5EF4-FFF2-40B4-BE49-F238E27FC236}">
-                <a16:creationId xmlns:a16="http://schemas.microsoft.com/office/drawing/2014/main" id="{03CDB03C-8AB1-534E-C121-365BE852675C}"/>
+                <a16:creationId xmlns:a16="http://schemas.microsoft.com/office/drawing/2014/main" id="{0276A568-D427-E2A1-DC5A-3BA97DFF4FAA}"/>
               </a:ext>
             </a:extLst>
           </p:cNvPr>
@@ -4402,7 +4402,7 @@
           <p:cNvPr id="4" name="テキスト ボックス 3">
             <a:extLst>
               <a:ext uri="{FF2B5EF4-FFF2-40B4-BE49-F238E27FC236}">
-                <a16:creationId xmlns:a16="http://schemas.microsoft.com/office/drawing/2014/main" id="{1BF063EB-45B7-4D5E-F10E-A0FF9E916DF2}"/>
+                <a16:creationId xmlns:a16="http://schemas.microsoft.com/office/drawing/2014/main" id="{56C3B9C4-3CF0-E565-65DC-DADE4BEAD981}"/>
               </a:ext>
             </a:extLst>
           </p:cNvPr>
@@ -4497,7 +4497,7 @@
           <p:cNvPr id="5" name="テキスト ボックス 4">
             <a:extLst>
               <a:ext uri="{FF2B5EF4-FFF2-40B4-BE49-F238E27FC236}">
-                <a16:creationId xmlns:a16="http://schemas.microsoft.com/office/drawing/2014/main" id="{D667C7E6-3810-514C-B3A6-1BFD538B4CD5}"/>
+                <a16:creationId xmlns:a16="http://schemas.microsoft.com/office/drawing/2014/main" id="{5C71A8B0-C266-6B30-853C-99F36F01BCD9}"/>
               </a:ext>
             </a:extLst>
           </p:cNvPr>
@@ -4544,7 +4544,7 @@
             <a:hlinkClick r:id="" action="ppaction://media"/>
             <a:extLst>
               <a:ext uri="{FF2B5EF4-FFF2-40B4-BE49-F238E27FC236}">
-                <a16:creationId xmlns:a16="http://schemas.microsoft.com/office/drawing/2014/main" id="{B5BCEB47-6EC4-A291-CEA8-1BE20DF8ABBF}"/>
+                <a16:creationId xmlns:a16="http://schemas.microsoft.com/office/drawing/2014/main" id="{9B3AD58E-01D8-948F-C8DF-A9AC1BA18AAD}"/>
               </a:ext>
             </a:extLst>
           </p:cNvPr>
@@ -4579,7 +4579,7 @@
     </p:spTree>
     <p:extLst>
       <p:ext uri="{BB962C8B-B14F-4D97-AF65-F5344CB8AC3E}">
-        <p14:creationId xmlns:p14="http://schemas.microsoft.com/office/powerpoint/2010/main" val="2112385177"/>
+        <p14:creationId xmlns:p14="http://schemas.microsoft.com/office/powerpoint/2010/main" val="2285787439"/>
       </p:ext>
     </p:extLst>
   </p:cSld>
@@ -4703,7 +4703,7 @@
           <p:cNvPr id="2" name="テキスト ボックス 1">
             <a:extLst>
               <a:ext uri="{FF2B5EF4-FFF2-40B4-BE49-F238E27FC236}">
-                <a16:creationId xmlns:a16="http://schemas.microsoft.com/office/drawing/2014/main" id="{AAA6DF5C-C826-5B46-A13E-87EB0B9A9EDE}"/>
+                <a16:creationId xmlns:a16="http://schemas.microsoft.com/office/drawing/2014/main" id="{B7B05D4A-5009-8999-DA4E-CFE24F689BB9}"/>
               </a:ext>
             </a:extLst>
           </p:cNvPr>
@@ -4749,7 +4749,7 @@
           <p:cNvPr id="3" name="テキスト ボックス 2">
             <a:extLst>
               <a:ext uri="{FF2B5EF4-FFF2-40B4-BE49-F238E27FC236}">
-                <a16:creationId xmlns:a16="http://schemas.microsoft.com/office/drawing/2014/main" id="{44A57AC2-5AB9-F527-C3BE-044BA0E59BF1}"/>
+                <a16:creationId xmlns:a16="http://schemas.microsoft.com/office/drawing/2014/main" id="{3D313E49-77BA-2E34-6B01-3E9A785DBCD8}"/>
               </a:ext>
             </a:extLst>
           </p:cNvPr>
@@ -4789,7 +4789,7 @@
           <p:cNvPr id="4" name="テキスト ボックス 3">
             <a:extLst>
               <a:ext uri="{FF2B5EF4-FFF2-40B4-BE49-F238E27FC236}">
-                <a16:creationId xmlns:a16="http://schemas.microsoft.com/office/drawing/2014/main" id="{082EE838-0D86-3BB6-F01D-9CA26AB89C6C}"/>
+                <a16:creationId xmlns:a16="http://schemas.microsoft.com/office/drawing/2014/main" id="{4D05E3DF-E021-4449-9AD3-B4F5753CEA63}"/>
               </a:ext>
             </a:extLst>
           </p:cNvPr>
@@ -4899,7 +4899,7 @@
           <p:cNvPr id="5" name="テキスト ボックス 4">
             <a:extLst>
               <a:ext uri="{FF2B5EF4-FFF2-40B4-BE49-F238E27FC236}">
-                <a16:creationId xmlns:a16="http://schemas.microsoft.com/office/drawing/2014/main" id="{DECE65BA-1F7B-4C1B-F7E1-0CCE94D5490A}"/>
+                <a16:creationId xmlns:a16="http://schemas.microsoft.com/office/drawing/2014/main" id="{14F891AF-77D6-DE73-D329-70870BE40862}"/>
               </a:ext>
             </a:extLst>
           </p:cNvPr>
@@ -4946,7 +4946,7 @@
             <a:hlinkClick r:id="" action="ppaction://media"/>
             <a:extLst>
               <a:ext uri="{FF2B5EF4-FFF2-40B4-BE49-F238E27FC236}">
-                <a16:creationId xmlns:a16="http://schemas.microsoft.com/office/drawing/2014/main" id="{FE45DDC9-C30A-2F81-997A-105F28185D23}"/>
+                <a16:creationId xmlns:a16="http://schemas.microsoft.com/office/drawing/2014/main" id="{C01A88D9-E70E-5A01-3E10-81721DD1B54F}"/>
               </a:ext>
             </a:extLst>
           </p:cNvPr>
@@ -4981,7 +4981,7 @@
     </p:spTree>
     <p:extLst>
       <p:ext uri="{BB962C8B-B14F-4D97-AF65-F5344CB8AC3E}">
-        <p14:creationId xmlns:p14="http://schemas.microsoft.com/office/powerpoint/2010/main" val="582284364"/>
+        <p14:creationId xmlns:p14="http://schemas.microsoft.com/office/powerpoint/2010/main" val="4282390765"/>
       </p:ext>
     </p:extLst>
   </p:cSld>
@@ -5105,7 +5105,7 @@
           <p:cNvPr id="2" name="テキスト ボックス 1">
             <a:extLst>
               <a:ext uri="{FF2B5EF4-FFF2-40B4-BE49-F238E27FC236}">
-                <a16:creationId xmlns:a16="http://schemas.microsoft.com/office/drawing/2014/main" id="{FB15181B-68A0-33F6-0FCD-1A386E110D5B}"/>
+                <a16:creationId xmlns:a16="http://schemas.microsoft.com/office/drawing/2014/main" id="{06060ED1-68AD-D764-20A6-9F61F7520FA3}"/>
               </a:ext>
             </a:extLst>
           </p:cNvPr>
@@ -5151,7 +5151,7 @@
           <p:cNvPr id="3" name="テキスト ボックス 2">
             <a:extLst>
               <a:ext uri="{FF2B5EF4-FFF2-40B4-BE49-F238E27FC236}">
-                <a16:creationId xmlns:a16="http://schemas.microsoft.com/office/drawing/2014/main" id="{D24F18A3-8F03-1237-3B5A-DDFFB18AC555}"/>
+                <a16:creationId xmlns:a16="http://schemas.microsoft.com/office/drawing/2014/main" id="{F1C02F25-1F68-DD4E-33A4-46F14329F69D}"/>
               </a:ext>
             </a:extLst>
           </p:cNvPr>
@@ -5191,7 +5191,7 @@
           <p:cNvPr id="4" name="テキスト ボックス 3">
             <a:extLst>
               <a:ext uri="{FF2B5EF4-FFF2-40B4-BE49-F238E27FC236}">
-                <a16:creationId xmlns:a16="http://schemas.microsoft.com/office/drawing/2014/main" id="{AC2F0BCF-2212-DD28-49CF-7F682D7F694A}"/>
+                <a16:creationId xmlns:a16="http://schemas.microsoft.com/office/drawing/2014/main" id="{327332A4-D080-D3F8-0138-CDACF30B6CA8}"/>
               </a:ext>
             </a:extLst>
           </p:cNvPr>
@@ -5215,20 +5215,14 @@
           <a:lstStyle/>
           <a:p>
             <a:r>
-              <a:rPr kumimoji="1" lang="en-US" altLang="ja-JP" sz="2000">
+              <a:rPr kumimoji="1" lang="ja-JP" altLang="en-US" sz="2000">
                 <a:solidFill>
                   <a:srgbClr val="333333"/>
                 </a:solidFill>
                 <a:latin typeface="Arial" panose="020B0604020202020204" pitchFamily="34" charset="0"/>
               </a:rPr>
-              <a:t>Set confirmed custom domain</a:t>
-            </a:r>
-            <a:endParaRPr kumimoji="1" lang="ja-JP" altLang="en-US" sz="2000">
-              <a:solidFill>
-                <a:srgbClr val="333333"/>
-              </a:solidFill>
-              <a:latin typeface="Arial" panose="020B0604020202020204" pitchFamily="34" charset="0"/>
-            </a:endParaRPr>
+              <a:t>直近のコミットでは、実装の見直しと継続的な改善が行われました。</a:t>
+            </a:r>
           </a:p>
         </p:txBody>
       </p:sp>
@@ -5237,7 +5231,7 @@
           <p:cNvPr id="5" name="テキスト ボックス 4">
             <a:extLst>
               <a:ext uri="{FF2B5EF4-FFF2-40B4-BE49-F238E27FC236}">
-                <a16:creationId xmlns:a16="http://schemas.microsoft.com/office/drawing/2014/main" id="{5C258164-0883-FCBC-8DD4-B1749291C5C4}"/>
+                <a16:creationId xmlns:a16="http://schemas.microsoft.com/office/drawing/2014/main" id="{E9F5D5FC-71B6-4198-566E-61AF7F142489}"/>
               </a:ext>
             </a:extLst>
           </p:cNvPr>
@@ -5284,7 +5278,7 @@
             <a:hlinkClick r:id="" action="ppaction://media"/>
             <a:extLst>
               <a:ext uri="{FF2B5EF4-FFF2-40B4-BE49-F238E27FC236}">
-                <a16:creationId xmlns:a16="http://schemas.microsoft.com/office/drawing/2014/main" id="{1B32BC92-C19F-30A9-C1F5-85135681ECD6}"/>
+                <a16:creationId xmlns:a16="http://schemas.microsoft.com/office/drawing/2014/main" id="{C13DDDAF-14B5-43D2-E5DC-72F35EB6CB6C}"/>
               </a:ext>
             </a:extLst>
           </p:cNvPr>
@@ -5319,7 +5313,7 @@
     </p:spTree>
     <p:extLst>
       <p:ext uri="{BB962C8B-B14F-4D97-AF65-F5344CB8AC3E}">
-        <p14:creationId xmlns:p14="http://schemas.microsoft.com/office/powerpoint/2010/main" val="2577632203"/>
+        <p14:creationId xmlns:p14="http://schemas.microsoft.com/office/powerpoint/2010/main" val="1774509880"/>
       </p:ext>
     </p:extLst>
   </p:cSld>
@@ -5362,7 +5356,7 @@
                                   <p:childTnLst>
                                     <p:cmd type="call" cmd="playFrom(0.0)">
                                       <p:cBhvr>
-                                        <p:cTn id="6" dur="6451" fill="hold"/>
+                                        <p:cTn id="6" dur="6076" fill="hold"/>
                                         <p:tgtEl>
                                           <p:spTgt spid="6"/>
                                         </p:tgtEl>
@@ -5443,7 +5437,7 @@
           <p:cNvPr id="2" name="テキスト ボックス 1">
             <a:extLst>
               <a:ext uri="{FF2B5EF4-FFF2-40B4-BE49-F238E27FC236}">
-                <a16:creationId xmlns:a16="http://schemas.microsoft.com/office/drawing/2014/main" id="{F32795C4-6EED-60FF-68C3-AFAAEE7EB342}"/>
+                <a16:creationId xmlns:a16="http://schemas.microsoft.com/office/drawing/2014/main" id="{C5B1F1D8-8B1D-D1F8-2E37-783353BDC685}"/>
               </a:ext>
             </a:extLst>
           </p:cNvPr>
@@ -5489,7 +5483,7 @@
           <p:cNvPr id="3" name="テキスト ボックス 2">
             <a:extLst>
               <a:ext uri="{FF2B5EF4-FFF2-40B4-BE49-F238E27FC236}">
-                <a16:creationId xmlns:a16="http://schemas.microsoft.com/office/drawing/2014/main" id="{2011C9D5-1CF5-20FC-ABDD-2867514CD238}"/>
+                <a16:creationId xmlns:a16="http://schemas.microsoft.com/office/drawing/2014/main" id="{2A53615E-F682-9C37-D635-E2AE3802F93F}"/>
               </a:ext>
             </a:extLst>
           </p:cNvPr>
@@ -5529,7 +5523,7 @@
           <p:cNvPr id="4" name="テキスト ボックス 3">
             <a:extLst>
               <a:ext uri="{FF2B5EF4-FFF2-40B4-BE49-F238E27FC236}">
-                <a16:creationId xmlns:a16="http://schemas.microsoft.com/office/drawing/2014/main" id="{1F75FDC9-DACD-D84D-EDDB-3B91EA788126}"/>
+                <a16:creationId xmlns:a16="http://schemas.microsoft.com/office/drawing/2014/main" id="{B9B86680-5645-7711-CBB6-D35BFC609C4C}"/>
               </a:ext>
             </a:extLst>
           </p:cNvPr>
@@ -5594,7 +5588,7 @@
           <p:cNvPr id="5" name="テキスト ボックス 4">
             <a:extLst>
               <a:ext uri="{FF2B5EF4-FFF2-40B4-BE49-F238E27FC236}">
-                <a16:creationId xmlns:a16="http://schemas.microsoft.com/office/drawing/2014/main" id="{16FED52C-A87D-E4AF-ADA5-028EF6567632}"/>
+                <a16:creationId xmlns:a16="http://schemas.microsoft.com/office/drawing/2014/main" id="{5265CDE7-5E41-3F45-123A-3050646756AF}"/>
               </a:ext>
             </a:extLst>
           </p:cNvPr>
@@ -5641,7 +5635,7 @@
             <a:hlinkClick r:id="" action="ppaction://media"/>
             <a:extLst>
               <a:ext uri="{FF2B5EF4-FFF2-40B4-BE49-F238E27FC236}">
-                <a16:creationId xmlns:a16="http://schemas.microsoft.com/office/drawing/2014/main" id="{73D7BA2E-9BD2-70AB-71AB-D56C48E320CC}"/>
+                <a16:creationId xmlns:a16="http://schemas.microsoft.com/office/drawing/2014/main" id="{3066C2E6-2495-E609-44D7-7F2E672284E2}"/>
               </a:ext>
             </a:extLst>
           </p:cNvPr>
@@ -5676,7 +5670,7 @@
     </p:spTree>
     <p:extLst>
       <p:ext uri="{BB962C8B-B14F-4D97-AF65-F5344CB8AC3E}">
-        <p14:creationId xmlns:p14="http://schemas.microsoft.com/office/powerpoint/2010/main" val="1138961788"/>
+        <p14:creationId xmlns:p14="http://schemas.microsoft.com/office/powerpoint/2010/main" val="1120456071"/>
       </p:ext>
     </p:extLst>
   </p:cSld>
